--- a/e2e/fixtures/templates/minimal-academic.pptx
+++ b/e2e/fixtures/templates/minimal-academic.pptx
@@ -92,7 +92,7 @@
           <p:cNvPr id="2" name="TextBox 2">
             <a:extLst>
               <a:ext uri="{FF2B5EF4-FFF2-40B4-BE49-F238E27FC236}">
-                <a16:creationId xmlns:a16="http://schemas.microsoft.com/office/drawing/2014/main" id="{EC2A84FA-F6B2-4908-8E52-49B3607A267A}"/>
+                <a16:creationId xmlns:a16="http://schemas.microsoft.com/office/drawing/2014/main" id="{66812D53-1BF4-46F9-BF96-FE22AA9A5B30}"/>
               </a:ext>
             </a:extLst>
           </p:cNvPr>
@@ -121,7 +121,7 @@
           <p:cNvPr id="3" name="TextBox 3">
             <a:extLst>
               <a:ext uri="{FF2B5EF4-FFF2-40B4-BE49-F238E27FC236}">
-                <a16:creationId xmlns:a16="http://schemas.microsoft.com/office/drawing/2014/main" id="{B5390B5F-C3C4-4344-BE47-067B51F7C0BE}"/>
+                <a16:creationId xmlns:a16="http://schemas.microsoft.com/office/drawing/2014/main" id="{83FCABE5-DDBF-4137-A5C0-A92319099084}"/>
               </a:ext>
             </a:extLst>
           </p:cNvPr>
@@ -141,122 +141,6 @@
             <a:r>
               <a:rPr sz="1800"/>
               <a:t>A thesis-defense style owned fixture</a:t>
-            </a:r>
-          </a:p>
-        </p:txBody>
-      </p:sp>
-      <p:sp>
-        <p:nvSpPr>
-          <p:cNvPr id="4" name="TextBox 4">
-            <a:extLst>
-              <a:ext uri="{FF2B5EF4-FFF2-40B4-BE49-F238E27FC236}">
-                <a16:creationId xmlns:a16="http://schemas.microsoft.com/office/drawing/2014/main" id="{816597EA-2206-4504-8F2E-32DB2AEEF93F}"/>
-              </a:ext>
-            </a:extLst>
-          </p:cNvPr>
-          <p:cNvSpPr txBox="1"/>
-          <p:nvPr/>
-        </p:nvSpPr>
-        <p:spPr>
-          <a:xfrm>
-            <a:off x="914400" y="457200"/>
-            <a:ext cx="9906000" cy="914400"/>
-          </a:xfrm>
-        </p:spPr>
-        <p:txBody>
-          <a:bodyPr wrap="square" rtlCol="0"/>
-          <a:lstStyle/>
-          <a:p>
-            <a:r>
-              <a:rPr sz="2400" b="1"/>
-              <a:t>Research Method</a:t>
-            </a:r>
-          </a:p>
-        </p:txBody>
-      </p:sp>
-      <p:sp>
-        <p:nvSpPr>
-          <p:cNvPr id="5" name="TextBox 5">
-            <a:extLst>
-              <a:ext uri="{FF2B5EF4-FFF2-40B4-BE49-F238E27FC236}">
-                <a16:creationId xmlns:a16="http://schemas.microsoft.com/office/drawing/2014/main" id="{320234B7-F277-4587-83F4-39897B244CBF}"/>
-              </a:ext>
-            </a:extLst>
-          </p:cNvPr>
-          <p:cNvSpPr txBox="1"/>
-          <p:nvPr/>
-        </p:nvSpPr>
-        <p:spPr>
-          <a:xfrm>
-            <a:off x="914400" y="1371600"/>
-            <a:ext cx="9906000" cy="4572000"/>
-          </a:xfrm>
-        </p:spPr>
-        <p:txBody>
-          <a:bodyPr wrap="square" rtlCol="0"/>
-          <a:lstStyle/>
-          <a:p>
-            <a:r>
-              <a:rPr sz="1400"/>
-              <a:t>Mixed-method design with a controlled study.</a:t>
-            </a:r>
-          </a:p>
-        </p:txBody>
-      </p:sp>
-      <p:sp>
-        <p:nvSpPr>
-          <p:cNvPr id="6" name="TextBox 6">
-            <a:extLst>
-              <a:ext uri="{FF2B5EF4-FFF2-40B4-BE49-F238E27FC236}">
-                <a16:creationId xmlns:a16="http://schemas.microsoft.com/office/drawing/2014/main" id="{8694D0C0-FA1A-4ED5-85F3-96670ECCF0DD}"/>
-              </a:ext>
-            </a:extLst>
-          </p:cNvPr>
-          <p:cNvSpPr txBox="1"/>
-          <p:nvPr/>
-        </p:nvSpPr>
-        <p:spPr>
-          <a:xfrm>
-            <a:off x="914400" y="457200"/>
-            <a:ext cx="9906000" cy="914400"/>
-          </a:xfrm>
-        </p:spPr>
-        <p:txBody>
-          <a:bodyPr wrap="square" rtlCol="0"/>
-          <a:lstStyle/>
-          <a:p>
-            <a:r>
-              <a:rPr sz="2400" b="1"/>
-              <a:t>Conclusion</a:t>
-            </a:r>
-          </a:p>
-        </p:txBody>
-      </p:sp>
-      <p:sp>
-        <p:nvSpPr>
-          <p:cNvPr id="7" name="TextBox 7">
-            <a:extLst>
-              <a:ext uri="{FF2B5EF4-FFF2-40B4-BE49-F238E27FC236}">
-                <a16:creationId xmlns:a16="http://schemas.microsoft.com/office/drawing/2014/main" id="{13EC568F-09B8-413D-8D66-F8CC863EEC24}"/>
-              </a:ext>
-            </a:extLst>
-          </p:cNvPr>
-          <p:cNvSpPr txBox="1"/>
-          <p:nvPr/>
-        </p:nvSpPr>
-        <p:spPr>
-          <a:xfrm>
-            <a:off x="914400" y="1371600"/>
-            <a:ext cx="9906000" cy="4572000"/>
-          </a:xfrm>
-        </p:spPr>
-        <p:txBody>
-          <a:bodyPr wrap="square" rtlCol="0"/>
-          <a:lstStyle/>
-          <a:p>
-            <a:r>
-              <a:rPr sz="1400"/>
-              <a:t>The owned fixture closes the E2E loop.</a:t>
             </a:r>
           </a:p>
         </p:txBody>
@@ -291,7 +175,7 @@
           <p:cNvPr id="2" name="TextBox 2">
             <a:extLst>
               <a:ext uri="{FF2B5EF4-FFF2-40B4-BE49-F238E27FC236}">
-                <a16:creationId xmlns:a16="http://schemas.microsoft.com/office/drawing/2014/main" id="{EC2A84FA-F6B2-4908-8E52-49B3607A267A}"/>
+                <a16:creationId xmlns:a16="http://schemas.microsoft.com/office/drawing/2014/main" id="{66812D53-1BF4-46F9-BF96-FE22AA9A5B30}"/>
               </a:ext>
             </a:extLst>
           </p:cNvPr>
@@ -320,7 +204,7 @@
           <p:cNvPr id="3" name="TextBox 3">
             <a:extLst>
               <a:ext uri="{FF2B5EF4-FFF2-40B4-BE49-F238E27FC236}">
-                <a16:creationId xmlns:a16="http://schemas.microsoft.com/office/drawing/2014/main" id="{B5390B5F-C3C4-4344-BE47-067B51F7C0BE}"/>
+                <a16:creationId xmlns:a16="http://schemas.microsoft.com/office/drawing/2014/main" id="{83FCABE5-DDBF-4137-A5C0-A92319099084}"/>
               </a:ext>
             </a:extLst>
           </p:cNvPr>
@@ -340,6 +224,64 @@
             <a:r>
               <a:rPr sz="1800"/>
               <a:t>A thesis-defense style owned fixture</a:t>
+            </a:r>
+          </a:p>
+        </p:txBody>
+      </p:sp>
+      <p:sp>
+        <p:nvSpPr>
+          <p:cNvPr id="4" name="TextBox 4">
+            <a:extLst>
+              <a:ext uri="{FF2B5EF4-FFF2-40B4-BE49-F238E27FC236}">
+                <a16:creationId xmlns:a16="http://schemas.microsoft.com/office/drawing/2014/main" id="{BB1A2E1F-86BF-4315-A500-E03A2094210F}"/>
+              </a:ext>
+            </a:extLst>
+          </p:cNvPr>
+          <p:cNvSpPr txBox="1"/>
+          <p:nvPr/>
+        </p:nvSpPr>
+        <p:spPr>
+          <a:xfrm>
+            <a:off x="914400" y="457200"/>
+            <a:ext cx="9906000" cy="914400"/>
+          </a:xfrm>
+        </p:spPr>
+        <p:txBody>
+          <a:bodyPr wrap="square" rtlCol="0"/>
+          <a:lstStyle/>
+          <a:p>
+            <a:r>
+              <a:rPr sz="2400" b="1"/>
+              <a:t>Research Method</a:t>
+            </a:r>
+          </a:p>
+        </p:txBody>
+      </p:sp>
+      <p:sp>
+        <p:nvSpPr>
+          <p:cNvPr id="5" name="TextBox 5">
+            <a:extLst>
+              <a:ext uri="{FF2B5EF4-FFF2-40B4-BE49-F238E27FC236}">
+                <a16:creationId xmlns:a16="http://schemas.microsoft.com/office/drawing/2014/main" id="{5B7F736C-7A77-44FD-BA3A-9BA7D5E93B42}"/>
+              </a:ext>
+            </a:extLst>
+          </p:cNvPr>
+          <p:cNvSpPr txBox="1"/>
+          <p:nvPr/>
+        </p:nvSpPr>
+        <p:spPr>
+          <a:xfrm>
+            <a:off x="914400" y="1371600"/>
+            <a:ext cx="9906000" cy="4572000"/>
+          </a:xfrm>
+        </p:spPr>
+        <p:txBody>
+          <a:bodyPr wrap="square" rtlCol="0"/>
+          <a:lstStyle/>
+          <a:p>
+            <a:r>
+              <a:rPr sz="1400"/>
+              <a:t>Mixed-method design with a controlled study.</a:t>
             </a:r>
           </a:p>
         </p:txBody>
@@ -374,7 +316,7 @@
           <p:cNvPr id="2" name="TextBox 2">
             <a:extLst>
               <a:ext uri="{FF2B5EF4-FFF2-40B4-BE49-F238E27FC236}">
-                <a16:creationId xmlns:a16="http://schemas.microsoft.com/office/drawing/2014/main" id="{EC2A84FA-F6B2-4908-8E52-49B3607A267A}"/>
+                <a16:creationId xmlns:a16="http://schemas.microsoft.com/office/drawing/2014/main" id="{66812D53-1BF4-46F9-BF96-FE22AA9A5B30}"/>
               </a:ext>
             </a:extLst>
           </p:cNvPr>
@@ -403,7 +345,7 @@
           <p:cNvPr id="3" name="TextBox 3">
             <a:extLst>
               <a:ext uri="{FF2B5EF4-FFF2-40B4-BE49-F238E27FC236}">
-                <a16:creationId xmlns:a16="http://schemas.microsoft.com/office/drawing/2014/main" id="{B5390B5F-C3C4-4344-BE47-067B51F7C0BE}"/>
+                <a16:creationId xmlns:a16="http://schemas.microsoft.com/office/drawing/2014/main" id="{83FCABE5-DDBF-4137-A5C0-A92319099084}"/>
               </a:ext>
             </a:extLst>
           </p:cNvPr>
@@ -423,6 +365,122 @@
             <a:r>
               <a:rPr sz="1800"/>
               <a:t>A thesis-defense style owned fixture</a:t>
+            </a:r>
+          </a:p>
+        </p:txBody>
+      </p:sp>
+      <p:sp>
+        <p:nvSpPr>
+          <p:cNvPr id="4" name="TextBox 4">
+            <a:extLst>
+              <a:ext uri="{FF2B5EF4-FFF2-40B4-BE49-F238E27FC236}">
+                <a16:creationId xmlns:a16="http://schemas.microsoft.com/office/drawing/2014/main" id="{BB1A2E1F-86BF-4315-A500-E03A2094210F}"/>
+              </a:ext>
+            </a:extLst>
+          </p:cNvPr>
+          <p:cNvSpPr txBox="1"/>
+          <p:nvPr/>
+        </p:nvSpPr>
+        <p:spPr>
+          <a:xfrm>
+            <a:off x="914400" y="457200"/>
+            <a:ext cx="9906000" cy="914400"/>
+          </a:xfrm>
+        </p:spPr>
+        <p:txBody>
+          <a:bodyPr wrap="square" rtlCol="0"/>
+          <a:lstStyle/>
+          <a:p>
+            <a:r>
+              <a:rPr sz="2400" b="1"/>
+              <a:t>Research Method</a:t>
+            </a:r>
+          </a:p>
+        </p:txBody>
+      </p:sp>
+      <p:sp>
+        <p:nvSpPr>
+          <p:cNvPr id="5" name="TextBox 5">
+            <a:extLst>
+              <a:ext uri="{FF2B5EF4-FFF2-40B4-BE49-F238E27FC236}">
+                <a16:creationId xmlns:a16="http://schemas.microsoft.com/office/drawing/2014/main" id="{5B7F736C-7A77-44FD-BA3A-9BA7D5E93B42}"/>
+              </a:ext>
+            </a:extLst>
+          </p:cNvPr>
+          <p:cNvSpPr txBox="1"/>
+          <p:nvPr/>
+        </p:nvSpPr>
+        <p:spPr>
+          <a:xfrm>
+            <a:off x="914400" y="1371600"/>
+            <a:ext cx="9906000" cy="4572000"/>
+          </a:xfrm>
+        </p:spPr>
+        <p:txBody>
+          <a:bodyPr wrap="square" rtlCol="0"/>
+          <a:lstStyle/>
+          <a:p>
+            <a:r>
+              <a:rPr sz="1400"/>
+              <a:t>Mixed-method design with a controlled study.</a:t>
+            </a:r>
+          </a:p>
+        </p:txBody>
+      </p:sp>
+      <p:sp>
+        <p:nvSpPr>
+          <p:cNvPr id="6" name="TextBox 6">
+            <a:extLst>
+              <a:ext uri="{FF2B5EF4-FFF2-40B4-BE49-F238E27FC236}">
+                <a16:creationId xmlns:a16="http://schemas.microsoft.com/office/drawing/2014/main" id="{D970854F-A45D-4261-B97B-ED22B7B8D5E3}"/>
+              </a:ext>
+            </a:extLst>
+          </p:cNvPr>
+          <p:cNvSpPr txBox="1"/>
+          <p:nvPr/>
+        </p:nvSpPr>
+        <p:spPr>
+          <a:xfrm>
+            <a:off x="914400" y="457200"/>
+            <a:ext cx="9906000" cy="914400"/>
+          </a:xfrm>
+        </p:spPr>
+        <p:txBody>
+          <a:bodyPr wrap="square" rtlCol="0"/>
+          <a:lstStyle/>
+          <a:p>
+            <a:r>
+              <a:rPr sz="2400" b="1"/>
+              <a:t>Conclusion</a:t>
+            </a:r>
+          </a:p>
+        </p:txBody>
+      </p:sp>
+      <p:sp>
+        <p:nvSpPr>
+          <p:cNvPr id="7" name="TextBox 7">
+            <a:extLst>
+              <a:ext uri="{FF2B5EF4-FFF2-40B4-BE49-F238E27FC236}">
+                <a16:creationId xmlns:a16="http://schemas.microsoft.com/office/drawing/2014/main" id="{8CC88BE3-190E-40B9-B850-BEB50F34784E}"/>
+              </a:ext>
+            </a:extLst>
+          </p:cNvPr>
+          <p:cNvSpPr txBox="1"/>
+          <p:nvPr/>
+        </p:nvSpPr>
+        <p:spPr>
+          <a:xfrm>
+            <a:off x="914400" y="1371600"/>
+            <a:ext cx="9906000" cy="4572000"/>
+          </a:xfrm>
+        </p:spPr>
+        <p:txBody>
+          <a:bodyPr wrap="square" rtlCol="0"/>
+          <a:lstStyle/>
+          <a:p>
+            <a:r>
+              <a:rPr sz="1400"/>
+              <a:t>The owned fixture closes the E2E loop.</a:t>
             </a:r>
           </a:p>
         </p:txBody>

--- a/e2e/fixtures/templates/minimal-academic.pptx
+++ b/e2e/fixtures/templates/minimal-academic.pptx
@@ -92,7 +92,7 @@
           <p:cNvPr id="2" name="TextBox 2">
             <a:extLst>
               <a:ext uri="{FF2B5EF4-FFF2-40B4-BE49-F238E27FC236}">
-                <a16:creationId xmlns:a16="http://schemas.microsoft.com/office/drawing/2014/main" id="{66812D53-1BF4-46F9-BF96-FE22AA9A5B30}"/>
+                <a16:creationId xmlns:a16="http://schemas.microsoft.com/office/drawing/2014/main" id="{A5211480-6452-4AFD-95A8-78AD63BBFA26}"/>
               </a:ext>
             </a:extLst>
           </p:cNvPr>
@@ -121,7 +121,7 @@
           <p:cNvPr id="3" name="TextBox 3">
             <a:extLst>
               <a:ext uri="{FF2B5EF4-FFF2-40B4-BE49-F238E27FC236}">
-                <a16:creationId xmlns:a16="http://schemas.microsoft.com/office/drawing/2014/main" id="{83FCABE5-DDBF-4137-A5C0-A92319099084}"/>
+                <a16:creationId xmlns:a16="http://schemas.microsoft.com/office/drawing/2014/main" id="{E6C92C43-FF7E-4686-AE7D-6CD25A08148F}"/>
               </a:ext>
             </a:extLst>
           </p:cNvPr>
@@ -175,7 +175,7 @@
           <p:cNvPr id="2" name="TextBox 2">
             <a:extLst>
               <a:ext uri="{FF2B5EF4-FFF2-40B4-BE49-F238E27FC236}">
-                <a16:creationId xmlns:a16="http://schemas.microsoft.com/office/drawing/2014/main" id="{66812D53-1BF4-46F9-BF96-FE22AA9A5B30}"/>
+                <a16:creationId xmlns:a16="http://schemas.microsoft.com/office/drawing/2014/main" id="{A5211480-6452-4AFD-95A8-78AD63BBFA26}"/>
               </a:ext>
             </a:extLst>
           </p:cNvPr>
@@ -204,7 +204,7 @@
           <p:cNvPr id="3" name="TextBox 3">
             <a:extLst>
               <a:ext uri="{FF2B5EF4-FFF2-40B4-BE49-F238E27FC236}">
-                <a16:creationId xmlns:a16="http://schemas.microsoft.com/office/drawing/2014/main" id="{83FCABE5-DDBF-4137-A5C0-A92319099084}"/>
+                <a16:creationId xmlns:a16="http://schemas.microsoft.com/office/drawing/2014/main" id="{E6C92C43-FF7E-4686-AE7D-6CD25A08148F}"/>
               </a:ext>
             </a:extLst>
           </p:cNvPr>
@@ -233,7 +233,7 @@
           <p:cNvPr id="4" name="TextBox 4">
             <a:extLst>
               <a:ext uri="{FF2B5EF4-FFF2-40B4-BE49-F238E27FC236}">
-                <a16:creationId xmlns:a16="http://schemas.microsoft.com/office/drawing/2014/main" id="{BB1A2E1F-86BF-4315-A500-E03A2094210F}"/>
+                <a16:creationId xmlns:a16="http://schemas.microsoft.com/office/drawing/2014/main" id="{E6FE5369-33DA-4F4B-9212-4F5D85862D1F}"/>
               </a:ext>
             </a:extLst>
           </p:cNvPr>
@@ -262,7 +262,7 @@
           <p:cNvPr id="5" name="TextBox 5">
             <a:extLst>
               <a:ext uri="{FF2B5EF4-FFF2-40B4-BE49-F238E27FC236}">
-                <a16:creationId xmlns:a16="http://schemas.microsoft.com/office/drawing/2014/main" id="{5B7F736C-7A77-44FD-BA3A-9BA7D5E93B42}"/>
+                <a16:creationId xmlns:a16="http://schemas.microsoft.com/office/drawing/2014/main" id="{7F67BCE7-339B-4CB3-8C97-7C3CD91E0104}"/>
               </a:ext>
             </a:extLst>
           </p:cNvPr>
@@ -316,7 +316,7 @@
           <p:cNvPr id="2" name="TextBox 2">
             <a:extLst>
               <a:ext uri="{FF2B5EF4-FFF2-40B4-BE49-F238E27FC236}">
-                <a16:creationId xmlns:a16="http://schemas.microsoft.com/office/drawing/2014/main" id="{66812D53-1BF4-46F9-BF96-FE22AA9A5B30}"/>
+                <a16:creationId xmlns:a16="http://schemas.microsoft.com/office/drawing/2014/main" id="{A5211480-6452-4AFD-95A8-78AD63BBFA26}"/>
               </a:ext>
             </a:extLst>
           </p:cNvPr>
@@ -345,7 +345,7 @@
           <p:cNvPr id="3" name="TextBox 3">
             <a:extLst>
               <a:ext uri="{FF2B5EF4-FFF2-40B4-BE49-F238E27FC236}">
-                <a16:creationId xmlns:a16="http://schemas.microsoft.com/office/drawing/2014/main" id="{83FCABE5-DDBF-4137-A5C0-A92319099084}"/>
+                <a16:creationId xmlns:a16="http://schemas.microsoft.com/office/drawing/2014/main" id="{E6C92C43-FF7E-4686-AE7D-6CD25A08148F}"/>
               </a:ext>
             </a:extLst>
           </p:cNvPr>
@@ -374,7 +374,7 @@
           <p:cNvPr id="4" name="TextBox 4">
             <a:extLst>
               <a:ext uri="{FF2B5EF4-FFF2-40B4-BE49-F238E27FC236}">
-                <a16:creationId xmlns:a16="http://schemas.microsoft.com/office/drawing/2014/main" id="{BB1A2E1F-86BF-4315-A500-E03A2094210F}"/>
+                <a16:creationId xmlns:a16="http://schemas.microsoft.com/office/drawing/2014/main" id="{E6FE5369-33DA-4F4B-9212-4F5D85862D1F}"/>
               </a:ext>
             </a:extLst>
           </p:cNvPr>
@@ -403,7 +403,7 @@
           <p:cNvPr id="5" name="TextBox 5">
             <a:extLst>
               <a:ext uri="{FF2B5EF4-FFF2-40B4-BE49-F238E27FC236}">
-                <a16:creationId xmlns:a16="http://schemas.microsoft.com/office/drawing/2014/main" id="{5B7F736C-7A77-44FD-BA3A-9BA7D5E93B42}"/>
+                <a16:creationId xmlns:a16="http://schemas.microsoft.com/office/drawing/2014/main" id="{7F67BCE7-339B-4CB3-8C97-7C3CD91E0104}"/>
               </a:ext>
             </a:extLst>
           </p:cNvPr>
@@ -432,7 +432,7 @@
           <p:cNvPr id="6" name="TextBox 6">
             <a:extLst>
               <a:ext uri="{FF2B5EF4-FFF2-40B4-BE49-F238E27FC236}">
-                <a16:creationId xmlns:a16="http://schemas.microsoft.com/office/drawing/2014/main" id="{D970854F-A45D-4261-B97B-ED22B7B8D5E3}"/>
+                <a16:creationId xmlns:a16="http://schemas.microsoft.com/office/drawing/2014/main" id="{A705E697-C2A5-40D0-8E1B-1EA95AFCFA20}"/>
               </a:ext>
             </a:extLst>
           </p:cNvPr>
@@ -461,7 +461,7 @@
           <p:cNvPr id="7" name="TextBox 7">
             <a:extLst>
               <a:ext uri="{FF2B5EF4-FFF2-40B4-BE49-F238E27FC236}">
-                <a16:creationId xmlns:a16="http://schemas.microsoft.com/office/drawing/2014/main" id="{8CC88BE3-190E-40B9-B850-BEB50F34784E}"/>
+                <a16:creationId xmlns:a16="http://schemas.microsoft.com/office/drawing/2014/main" id="{FFE0BB21-E8FF-4A56-B2F6-247501A900DA}"/>
               </a:ext>
             </a:extLst>
           </p:cNvPr>
